--- a/BASES/Presntacion programacion final.pptx
+++ b/BASES/Presntacion programacion final.pptx
@@ -110,6 +110,11 @@
       </a:defRPr>
     </a:lvl9pPr>
   </p:defaultTextStyle>
+  <p:extLst>
+    <p:ext uri="{EFAFB233-063F-42B5-8137-9DF3F51BA10A}">
+      <p15:sldGuideLst xmlns:p15="http://schemas.microsoft.com/office/powerpoint/2012/main"/>
+    </p:ext>
+  </p:extLst>
 </p:presentation>
 </file>
 
@@ -2940,7 +2945,7 @@
           <a:p>
             <a:fld id="{B705B3F0-4CD7-4939-8C66-5D41815329E7}" type="datetimeFigureOut">
               <a:rPr lang="en-US" smtClean="0"/>
-              <a:t>11/3/2025</a:t>
+              <a:t>11/5/2025</a:t>
             </a:fld>
             <a:endParaRPr lang="en-US"/>
           </a:p>
@@ -3138,7 +3143,7 @@
           <a:p>
             <a:fld id="{B705B3F0-4CD7-4939-8C66-5D41815329E7}" type="datetimeFigureOut">
               <a:rPr lang="en-US" smtClean="0"/>
-              <a:t>11/3/2025</a:t>
+              <a:t>11/5/2025</a:t>
             </a:fld>
             <a:endParaRPr lang="en-US"/>
           </a:p>
@@ -3346,7 +3351,7 @@
           <a:p>
             <a:fld id="{B705B3F0-4CD7-4939-8C66-5D41815329E7}" type="datetimeFigureOut">
               <a:rPr lang="en-US" smtClean="0"/>
-              <a:t>11/3/2025</a:t>
+              <a:t>11/5/2025</a:t>
             </a:fld>
             <a:endParaRPr lang="en-US"/>
           </a:p>
@@ -3544,7 +3549,7 @@
           <a:p>
             <a:fld id="{B705B3F0-4CD7-4939-8C66-5D41815329E7}" type="datetimeFigureOut">
               <a:rPr lang="en-US" smtClean="0"/>
-              <a:t>11/3/2025</a:t>
+              <a:t>11/5/2025</a:t>
             </a:fld>
             <a:endParaRPr lang="en-US"/>
           </a:p>
@@ -3819,7 +3824,7 @@
           <a:p>
             <a:fld id="{B705B3F0-4CD7-4939-8C66-5D41815329E7}" type="datetimeFigureOut">
               <a:rPr lang="en-US" smtClean="0"/>
-              <a:t>11/3/2025</a:t>
+              <a:t>11/5/2025</a:t>
             </a:fld>
             <a:endParaRPr lang="en-US"/>
           </a:p>
@@ -4084,7 +4089,7 @@
           <a:p>
             <a:fld id="{B705B3F0-4CD7-4939-8C66-5D41815329E7}" type="datetimeFigureOut">
               <a:rPr lang="en-US" smtClean="0"/>
-              <a:t>11/3/2025</a:t>
+              <a:t>11/5/2025</a:t>
             </a:fld>
             <a:endParaRPr lang="en-US"/>
           </a:p>
@@ -4496,7 +4501,7 @@
           <a:p>
             <a:fld id="{B705B3F0-4CD7-4939-8C66-5D41815329E7}" type="datetimeFigureOut">
               <a:rPr lang="en-US" smtClean="0"/>
-              <a:t>11/3/2025</a:t>
+              <a:t>11/5/2025</a:t>
             </a:fld>
             <a:endParaRPr lang="en-US"/>
           </a:p>
@@ -4637,7 +4642,7 @@
           <a:p>
             <a:fld id="{B705B3F0-4CD7-4939-8C66-5D41815329E7}" type="datetimeFigureOut">
               <a:rPr lang="en-US" smtClean="0"/>
-              <a:t>11/3/2025</a:t>
+              <a:t>11/5/2025</a:t>
             </a:fld>
             <a:endParaRPr lang="en-US"/>
           </a:p>
@@ -4750,7 +4755,7 @@
           <a:p>
             <a:fld id="{B705B3F0-4CD7-4939-8C66-5D41815329E7}" type="datetimeFigureOut">
               <a:rPr lang="en-US" smtClean="0"/>
-              <a:t>11/3/2025</a:t>
+              <a:t>11/5/2025</a:t>
             </a:fld>
             <a:endParaRPr lang="en-US"/>
           </a:p>
@@ -5061,7 +5066,7 @@
           <a:p>
             <a:fld id="{B705B3F0-4CD7-4939-8C66-5D41815329E7}" type="datetimeFigureOut">
               <a:rPr lang="en-US" smtClean="0"/>
-              <a:t>11/3/2025</a:t>
+              <a:t>11/5/2025</a:t>
             </a:fld>
             <a:endParaRPr lang="en-US"/>
           </a:p>
@@ -5349,7 +5354,7 @@
           <a:p>
             <a:fld id="{B705B3F0-4CD7-4939-8C66-5D41815329E7}" type="datetimeFigureOut">
               <a:rPr lang="en-US" smtClean="0"/>
-              <a:t>11/3/2025</a:t>
+              <a:t>11/5/2025</a:t>
             </a:fld>
             <a:endParaRPr lang="en-US"/>
           </a:p>
@@ -5590,7 +5595,7 @@
           <a:p>
             <a:fld id="{B705B3F0-4CD7-4939-8C66-5D41815329E7}" type="datetimeFigureOut">
               <a:rPr lang="en-US" smtClean="0"/>
-              <a:t>11/3/2025</a:t>
+              <a:t>11/5/2025</a:t>
             </a:fld>
             <a:endParaRPr lang="en-US"/>
           </a:p>
@@ -6109,8 +6114,8 @@
         </p:nvSpPr>
         <p:spPr>
           <a:xfrm>
-            <a:off x="3880430" y="583345"/>
-            <a:ext cx="7160357" cy="4164820"/>
+            <a:off x="1894114" y="583345"/>
+            <a:ext cx="9146673" cy="4164820"/>
           </a:xfrm>
         </p:spPr>
         <p:txBody>
@@ -6121,14 +6126,14 @@
           <a:p>
             <a:pPr algn="r"/>
             <a:r>
-              <a:rPr lang="es-ES" sz="6800">
+              <a:rPr lang="es-ES" sz="6800" dirty="0">
                 <a:solidFill>
                   <a:srgbClr val="FFFFFF"/>
                 </a:solidFill>
               </a:rPr>
-              <a:t>Análisis de Impacto del Programa RenovAr en el Empleo Regional</a:t>
+              <a:t>Análisis del empleo asalariado y remuneraciones en Argentina.</a:t>
             </a:r>
-            <a:endParaRPr lang="en-US" sz="6800">
+            <a:endParaRPr lang="en-US" sz="6800" dirty="0">
               <a:solidFill>
                 <a:srgbClr val="FFFFFF"/>
               </a:solidFill>
@@ -6154,8 +6159,8 @@
         </p:nvSpPr>
         <p:spPr>
           <a:xfrm>
-            <a:off x="1053687" y="5384267"/>
-            <a:ext cx="8578699" cy="712492"/>
+            <a:off x="966601" y="4579319"/>
+            <a:ext cx="8578699" cy="1626065"/>
           </a:xfrm>
         </p:spPr>
         <p:txBody>
@@ -6166,13 +6171,57 @@
           <a:p>
             <a:pPr algn="l"/>
             <a:r>
-              <a:rPr lang="es-ES" sz="2000" dirty="0">
+              <a:rPr lang="es-ES" sz="2000" b="1" dirty="0">
                 <a:solidFill>
                   <a:srgbClr val="FFFFFF"/>
                 </a:solidFill>
               </a:rPr>
-              <a:t>Estudio cuantitativo sobre los efectos de los proyectos de energías renovables en el mercado laboral departamental de Argentina (2015-2021)</a:t>
+              <a:t>Taller de programación, grupo 3.</a:t>
             </a:r>
+          </a:p>
+          <a:p>
+            <a:pPr algn="l"/>
+            <a:r>
+              <a:rPr lang="en-US" sz="2000" b="1" dirty="0">
+                <a:solidFill>
+                  <a:srgbClr val="FFFFFF"/>
+                </a:solidFill>
+              </a:rPr>
+              <a:t>Federico Kotzer</a:t>
+            </a:r>
+          </a:p>
+          <a:p>
+            <a:pPr algn="l"/>
+            <a:r>
+              <a:rPr lang="en-US" sz="2000" b="1" dirty="0">
+                <a:solidFill>
+                  <a:srgbClr val="FFFFFF"/>
+                </a:solidFill>
+              </a:rPr>
+              <a:t>Manuel Meza</a:t>
+            </a:r>
+          </a:p>
+          <a:p>
+            <a:pPr algn="l"/>
+            <a:r>
+              <a:rPr lang="en-US" sz="2000" b="1" dirty="0">
+                <a:solidFill>
+                  <a:srgbClr val="FFFFFF"/>
+                </a:solidFill>
+              </a:rPr>
+              <a:t>Maximiliano Pardini</a:t>
+            </a:r>
+          </a:p>
+          <a:p>
+            <a:pPr algn="l"/>
+            <a:endParaRPr lang="en-US" sz="2000" dirty="0">
+              <a:solidFill>
+                <a:srgbClr val="FFFFFF"/>
+              </a:solidFill>
+            </a:endParaRPr>
+          </a:p>
+          <a:p>
+            <a:pPr algn="l"/>
             <a:endParaRPr lang="en-US" sz="2000" dirty="0">
               <a:solidFill>
                 <a:srgbClr val="FFFFFF"/>
@@ -7936,7 +7985,7 @@
         <p:spPr>
           <a:xfrm>
             <a:off x="4810258" y="490561"/>
-            <a:ext cx="6555347" cy="2496491"/>
+            <a:ext cx="6555347" cy="2938439"/>
           </a:xfrm>
         </p:spPr>
         <p:style>
@@ -7963,225 +8012,86 @@
           <a:p>
             <a:r>
               <a:rPr lang="es-ES" sz="2000" dirty="0"/>
-              <a:t>Puestos de trabajo asalariados registrado y remuneraciones por departamento y sector (Enero/2015 - Diciembre/2021). Combina el padrón de inscripción de empresas de AFIP junto con los registros administrativos del Sistema Integrado Previsional Argentino (SIPA) y los registros del sistema Simplificación Registral (SR).</a:t>
+              <a:t>Puestos de trabajo asalariados registrado y remuneraciones por departamento y sector.</a:t>
+            </a:r>
+          </a:p>
+          <a:p>
+            <a:r>
+              <a:rPr lang="es-ES" sz="2000" dirty="0"/>
+              <a:t>Combina el padrón de inscripción de empresas de AFIP junto con los registros administrativos del Sistema Integrado Previsional Argentino (SIPA) y los registros del sistema Simplificación Registral (SR).</a:t>
             </a:r>
           </a:p>
         </p:txBody>
       </p:sp>
-      <p:sp>
-        <p:nvSpPr>
-          <p:cNvPr id="5" name="Content Placeholder 2">
-            <a:extLst>
-              <a:ext uri="{FF2B5EF4-FFF2-40B4-BE49-F238E27FC236}">
-                <a16:creationId xmlns:a16="http://schemas.microsoft.com/office/drawing/2014/main" id="{7C85E092-B172-060B-634B-67EEE3B873BA}"/>
-              </a:ext>
-            </a:extLst>
-          </p:cNvPr>
-          <p:cNvSpPr txBox="1">
-            <a:spLocks/>
-          </p:cNvSpPr>
+      <p:pic>
+        <p:nvPicPr>
+          <p:cNvPr id="4" name="Imagen 43">
+            <a:extLst>
+              <a:ext uri="{FF2B5EF4-FFF2-40B4-BE49-F238E27FC236}">
+                <a16:creationId xmlns:a16="http://schemas.microsoft.com/office/drawing/2014/main" id="{79E0AF5A-C558-D95E-CFE6-057C249207C7}"/>
+              </a:ext>
+            </a:extLst>
+          </p:cNvPr>
+          <p:cNvPicPr>
+            <a:picLocks noChangeAspect="1"/>
+          </p:cNvPicPr>
           <p:nvPr/>
-        </p:nvSpPr>
+        </p:nvPicPr>
+        <p:blipFill>
+          <a:blip r:embed="rId2"/>
+          <a:stretch>
+            <a:fillRect/>
+          </a:stretch>
+        </p:blipFill>
         <p:spPr>
           <a:xfrm>
-            <a:off x="4810259" y="3059197"/>
-            <a:ext cx="6555347" cy="2496491"/>
+            <a:off x="5953717" y="3660112"/>
+            <a:ext cx="4268427" cy="1787405"/>
           </a:xfrm>
           <a:prstGeom prst="rect">
             <a:avLst/>
           </a:prstGeom>
         </p:spPr>
-        <p:style>
-          <a:lnRef idx="1">
-            <a:schemeClr val="accent1"/>
-          </a:lnRef>
-          <a:fillRef idx="2">
-            <a:schemeClr val="accent1"/>
-          </a:fillRef>
-          <a:effectRef idx="1">
-            <a:schemeClr val="accent1"/>
-          </a:effectRef>
-          <a:fontRef idx="minor">
-            <a:schemeClr val="dk1"/>
-          </a:fontRef>
-        </p:style>
+      </p:pic>
+      <p:sp>
+        <p:nvSpPr>
+          <p:cNvPr id="6" name="CuadroTexto 21">
+            <a:extLst>
+              <a:ext uri="{FF2B5EF4-FFF2-40B4-BE49-F238E27FC236}">
+                <a16:creationId xmlns:a16="http://schemas.microsoft.com/office/drawing/2014/main" id="{BC39EA7E-788B-B6C8-62F7-F97BFD8E1AB3}"/>
+              </a:ext>
+            </a:extLst>
+          </p:cNvPr>
+          <p:cNvSpPr txBox="1"/>
+          <p:nvPr/>
+        </p:nvSpPr>
+        <p:spPr>
+          <a:xfrm>
+            <a:off x="5180257" y="5678629"/>
+            <a:ext cx="6866338" cy="307777"/>
+          </a:xfrm>
+          <a:prstGeom prst="rect">
+            <a:avLst/>
+          </a:prstGeom>
+          <a:noFill/>
+        </p:spPr>
         <p:txBody>
-          <a:bodyPr vert="horz" lIns="91440" tIns="45720" rIns="91440" bIns="45720" rtlCol="0" anchor="ctr">
-            <a:normAutofit/>
+          <a:bodyPr wrap="square" rtlCol="0">
+            <a:spAutoFit/>
           </a:bodyPr>
-          <a:lstStyle>
-            <a:lvl1pPr marL="228600" indent="-228600" algn="l" defTabSz="914400" rtl="0" eaLnBrk="1" latinLnBrk="0" hangingPunct="1">
-              <a:lnSpc>
-                <a:spcPct val="90000"/>
-              </a:lnSpc>
-              <a:spcBef>
-                <a:spcPts val="1000"/>
-              </a:spcBef>
-              <a:buFont typeface="Arial" panose="020B0604020202020204" pitchFamily="34" charset="0"/>
-              <a:buChar char="•"/>
-              <a:defRPr sz="2800" kern="1200">
-                <a:solidFill>
-                  <a:schemeClr val="tx1"/>
-                </a:solidFill>
-                <a:latin typeface="+mn-lt"/>
-                <a:ea typeface="+mn-ea"/>
-                <a:cs typeface="+mn-cs"/>
-              </a:defRPr>
-            </a:lvl1pPr>
-            <a:lvl2pPr marL="685800" indent="-228600" algn="l" defTabSz="914400" rtl="0" eaLnBrk="1" latinLnBrk="0" hangingPunct="1">
-              <a:lnSpc>
-                <a:spcPct val="90000"/>
-              </a:lnSpc>
-              <a:spcBef>
-                <a:spcPts val="500"/>
-              </a:spcBef>
-              <a:buFont typeface="Arial" panose="020B0604020202020204" pitchFamily="34" charset="0"/>
-              <a:buChar char="•"/>
-              <a:defRPr sz="2400" kern="1200">
-                <a:solidFill>
-                  <a:schemeClr val="tx1"/>
-                </a:solidFill>
-                <a:latin typeface="+mn-lt"/>
-                <a:ea typeface="+mn-ea"/>
-                <a:cs typeface="+mn-cs"/>
-              </a:defRPr>
-            </a:lvl2pPr>
-            <a:lvl3pPr marL="1143000" indent="-228600" algn="l" defTabSz="914400" rtl="0" eaLnBrk="1" latinLnBrk="0" hangingPunct="1">
-              <a:lnSpc>
-                <a:spcPct val="90000"/>
-              </a:lnSpc>
-              <a:spcBef>
-                <a:spcPts val="500"/>
-              </a:spcBef>
-              <a:buFont typeface="Arial" panose="020B0604020202020204" pitchFamily="34" charset="0"/>
-              <a:buChar char="•"/>
-              <a:defRPr sz="2000" kern="1200">
-                <a:solidFill>
-                  <a:schemeClr val="tx1"/>
-                </a:solidFill>
-                <a:latin typeface="+mn-lt"/>
-                <a:ea typeface="+mn-ea"/>
-                <a:cs typeface="+mn-cs"/>
-              </a:defRPr>
-            </a:lvl3pPr>
-            <a:lvl4pPr marL="1600200" indent="-228600" algn="l" defTabSz="914400" rtl="0" eaLnBrk="1" latinLnBrk="0" hangingPunct="1">
-              <a:lnSpc>
-                <a:spcPct val="90000"/>
-              </a:lnSpc>
-              <a:spcBef>
-                <a:spcPts val="500"/>
-              </a:spcBef>
-              <a:buFont typeface="Arial" panose="020B0604020202020204" pitchFamily="34" charset="0"/>
-              <a:buChar char="•"/>
-              <a:defRPr sz="1800" kern="1200">
-                <a:solidFill>
-                  <a:schemeClr val="tx1"/>
-                </a:solidFill>
-                <a:latin typeface="+mn-lt"/>
-                <a:ea typeface="+mn-ea"/>
-                <a:cs typeface="+mn-cs"/>
-              </a:defRPr>
-            </a:lvl4pPr>
-            <a:lvl5pPr marL="2057400" indent="-228600" algn="l" defTabSz="914400" rtl="0" eaLnBrk="1" latinLnBrk="0" hangingPunct="1">
-              <a:lnSpc>
-                <a:spcPct val="90000"/>
-              </a:lnSpc>
-              <a:spcBef>
-                <a:spcPts val="500"/>
-              </a:spcBef>
-              <a:buFont typeface="Arial" panose="020B0604020202020204" pitchFamily="34" charset="0"/>
-              <a:buChar char="•"/>
-              <a:defRPr sz="1800" kern="1200">
-                <a:solidFill>
-                  <a:schemeClr val="tx1"/>
-                </a:solidFill>
-                <a:latin typeface="+mn-lt"/>
-                <a:ea typeface="+mn-ea"/>
-                <a:cs typeface="+mn-cs"/>
-              </a:defRPr>
-            </a:lvl5pPr>
-            <a:lvl6pPr marL="2514600" indent="-228600" algn="l" defTabSz="914400" rtl="0" eaLnBrk="1" latinLnBrk="0" hangingPunct="1">
-              <a:lnSpc>
-                <a:spcPct val="90000"/>
-              </a:lnSpc>
-              <a:spcBef>
-                <a:spcPts val="500"/>
-              </a:spcBef>
-              <a:buFont typeface="Arial" panose="020B0604020202020204" pitchFamily="34" charset="0"/>
-              <a:buChar char="•"/>
-              <a:defRPr sz="1800" kern="1200">
-                <a:solidFill>
-                  <a:schemeClr val="tx1"/>
-                </a:solidFill>
-                <a:latin typeface="+mn-lt"/>
-                <a:ea typeface="+mn-ea"/>
-                <a:cs typeface="+mn-cs"/>
-              </a:defRPr>
-            </a:lvl6pPr>
-            <a:lvl7pPr marL="2971800" indent="-228600" algn="l" defTabSz="914400" rtl="0" eaLnBrk="1" latinLnBrk="0" hangingPunct="1">
-              <a:lnSpc>
-                <a:spcPct val="90000"/>
-              </a:lnSpc>
-              <a:spcBef>
-                <a:spcPts val="500"/>
-              </a:spcBef>
-              <a:buFont typeface="Arial" panose="020B0604020202020204" pitchFamily="34" charset="0"/>
-              <a:buChar char="•"/>
-              <a:defRPr sz="1800" kern="1200">
-                <a:solidFill>
-                  <a:schemeClr val="tx1"/>
-                </a:solidFill>
-                <a:latin typeface="+mn-lt"/>
-                <a:ea typeface="+mn-ea"/>
-                <a:cs typeface="+mn-cs"/>
-              </a:defRPr>
-            </a:lvl7pPr>
-            <a:lvl8pPr marL="3429000" indent="-228600" algn="l" defTabSz="914400" rtl="0" eaLnBrk="1" latinLnBrk="0" hangingPunct="1">
-              <a:lnSpc>
-                <a:spcPct val="90000"/>
-              </a:lnSpc>
-              <a:spcBef>
-                <a:spcPts val="500"/>
-              </a:spcBef>
-              <a:buFont typeface="Arial" panose="020B0604020202020204" pitchFamily="34" charset="0"/>
-              <a:buChar char="•"/>
-              <a:defRPr sz="1800" kern="1200">
-                <a:solidFill>
-                  <a:schemeClr val="tx1"/>
-                </a:solidFill>
-                <a:latin typeface="+mn-lt"/>
-                <a:ea typeface="+mn-ea"/>
-                <a:cs typeface="+mn-cs"/>
-              </a:defRPr>
-            </a:lvl8pPr>
-            <a:lvl9pPr marL="3886200" indent="-228600" algn="l" defTabSz="914400" rtl="0" eaLnBrk="1" latinLnBrk="0" hangingPunct="1">
-              <a:lnSpc>
-                <a:spcPct val="90000"/>
-              </a:lnSpc>
-              <a:spcBef>
-                <a:spcPts val="500"/>
-              </a:spcBef>
-              <a:buFont typeface="Arial" panose="020B0604020202020204" pitchFamily="34" charset="0"/>
-              <a:buChar char="•"/>
-              <a:defRPr sz="1800" kern="1200">
-                <a:solidFill>
-                  <a:schemeClr val="tx1"/>
-                </a:solidFill>
-                <a:latin typeface="+mn-lt"/>
-                <a:ea typeface="+mn-ea"/>
-                <a:cs typeface="+mn-cs"/>
-              </a:defRPr>
-            </a:lvl9pPr>
-          </a:lstStyle>
+          <a:lstStyle/>
           <a:p>
             <a:r>
-              <a:rPr lang="es-ES" sz="2000" dirty="0">
-                <a:solidFill>
-                  <a:schemeClr val="bg1"/>
-                </a:solidFill>
+              <a:rPr lang="es-AR" sz="1400" dirty="0"/>
+              <a:t>Fuente: </a:t>
+            </a:r>
+            <a:r>
+              <a:rPr lang="es-ES" sz="1400" dirty="0">
+                <a:hlinkClick r:id="rId3"/>
               </a:rPr>
-              <a:t>Puestos de trabajo asalariados registrado y remuneraciones por departamento y sector (Enero/2015 - Diciembre/2021). Combina el padrón de inscripción de empresas de AFIP junto con los registros administrativos del Sistema Integrado Previsional Argentino (SIPA) y los registros del sistema Simplificación Registral (SR).</a:t>
+              <a:t>Empleo y remuneraciones por departamento | Argentina.gob.ar</a:t>
             </a:r>
+            <a:endParaRPr lang="es-AR" sz="1400" dirty="0"/>
           </a:p>
         </p:txBody>
       </p:sp>
@@ -8301,8 +8211,8 @@
         </p:nvSpPr>
         <p:spPr>
           <a:xfrm>
-            <a:off x="6485366" y="299509"/>
-            <a:ext cx="4395340" cy="1540177"/>
+            <a:off x="6431964" y="299509"/>
+            <a:ext cx="4448742" cy="1540177"/>
           </a:xfrm>
         </p:spPr>
         <p:style>
@@ -8334,27 +8244,8 @@
                 <a:ea typeface="+mj-ea"/>
                 <a:cs typeface="+mj-cs"/>
               </a:rPr>
-              <a:t>Nivel de la base de </a:t>
+              <a:t>Nivel de la base de datos</a:t>
             </a:r>
-            <a:r>
-              <a:rPr lang="en-US" sz="5600" kern="1200" dirty="0" err="1">
-                <a:solidFill>
-                  <a:schemeClr val="tx1"/>
-                </a:solidFill>
-                <a:latin typeface="+mj-lt"/>
-                <a:ea typeface="+mj-ea"/>
-                <a:cs typeface="+mj-cs"/>
-              </a:rPr>
-              <a:t>datos</a:t>
-            </a:r>
-            <a:endParaRPr lang="en-US" sz="5600" kern="1200" dirty="0">
-              <a:solidFill>
-                <a:schemeClr val="tx1"/>
-              </a:solidFill>
-              <a:latin typeface="+mj-lt"/>
-              <a:ea typeface="+mj-ea"/>
-              <a:cs typeface="+mj-cs"/>
-            </a:endParaRPr>
           </a:p>
         </p:txBody>
       </p:sp>
@@ -8430,42 +8321,6 @@
           </a:p>
         </p:txBody>
       </p:sp>
-      <p:pic>
-        <p:nvPicPr>
-          <p:cNvPr id="6" name="Imagen 5" descr="Mapa&#10;&#10;El contenido generado por IA puede ser incorrecto.">
-            <a:extLst>
-              <a:ext uri="{FF2B5EF4-FFF2-40B4-BE49-F238E27FC236}">
-                <a16:creationId xmlns:a16="http://schemas.microsoft.com/office/drawing/2014/main" id="{76F5E8A1-D214-9D93-A3B3-AA5014A19246}"/>
-              </a:ext>
-            </a:extLst>
-          </p:cNvPr>
-          <p:cNvPicPr>
-            <a:picLocks noChangeAspect="1"/>
-          </p:cNvPicPr>
-          <p:nvPr/>
-        </p:nvPicPr>
-        <p:blipFill>
-          <a:blip r:embed="rId2">
-            <a:extLst>
-              <a:ext uri="{28A0092B-C50C-407E-A947-70E740481C1C}">
-                <a14:useLocalDpi xmlns:a14="http://schemas.microsoft.com/office/drawing/2010/main" val="0"/>
-              </a:ext>
-            </a:extLst>
-          </a:blip>
-          <a:stretch>
-            <a:fillRect/>
-          </a:stretch>
-        </p:blipFill>
-        <p:spPr>
-          <a:xfrm flipH="1">
-            <a:off x="1280033" y="299509"/>
-            <a:ext cx="3219844" cy="6258983"/>
-          </a:xfrm>
-          <a:prstGeom prst="rect">
-            <a:avLst/>
-          </a:prstGeom>
-        </p:spPr>
-      </p:pic>
       <p:sp>
         <p:nvSpPr>
           <p:cNvPr id="4" name="Text Placeholder 3">
@@ -8485,7 +8340,7 @@
         <p:spPr>
           <a:xfrm>
             <a:off x="6431964" y="1937658"/>
-            <a:ext cx="4480001" cy="4418692"/>
+            <a:ext cx="4480001" cy="3136107"/>
           </a:xfrm>
         </p:spPr>
         <p:style>
@@ -8515,34 +8370,12 @@
               <a:buChar char="•"/>
             </a:pPr>
             <a:r>
-              <a:rPr lang="en-US" sz="2000" b="1" dirty="0">
+              <a:rPr lang="es-419" sz="2000" b="1" noProof="0" dirty="0">
                 <a:solidFill>
-                  <a:schemeClr val="bg1">
-                    <a:alpha val="80000"/>
-                  </a:schemeClr>
+                  <a:schemeClr val="bg1"/>
                 </a:solidFill>
               </a:rPr>
-              <a:t>Nivel: </a:t>
-            </a:r>
-            <a:r>
-              <a:rPr lang="en-US" sz="2000" b="1" dirty="0" err="1">
-                <a:solidFill>
-                  <a:schemeClr val="bg1">
-                    <a:alpha val="80000"/>
-                  </a:schemeClr>
-                </a:solidFill>
-              </a:rPr>
-              <a:t>Departamental</a:t>
-            </a:r>
-            <a:r>
-              <a:rPr lang="en-US" sz="2000" b="1" dirty="0">
-                <a:solidFill>
-                  <a:schemeClr val="bg1">
-                    <a:alpha val="80000"/>
-                  </a:schemeClr>
-                </a:solidFill>
-              </a:rPr>
-              <a:t> </a:t>
+              <a:t>Nivel: Departamental  (520 departamentos provinciales)</a:t>
             </a:r>
           </a:p>
           <a:p>
@@ -8551,64 +8384,12 @@
               <a:buChar char="•"/>
             </a:pPr>
             <a:r>
-              <a:rPr lang="en-US" sz="2000" b="1" dirty="0" err="1">
+              <a:rPr lang="es-419" sz="2000" b="1" noProof="0" dirty="0">
                 <a:solidFill>
-                  <a:schemeClr val="bg1">
-                    <a:alpha val="80000"/>
-                  </a:schemeClr>
+                  <a:schemeClr val="bg1"/>
                 </a:solidFill>
               </a:rPr>
-              <a:t>Cobertura</a:t>
-            </a:r>
-            <a:r>
-              <a:rPr lang="en-US" sz="2000" b="1" dirty="0">
-                <a:solidFill>
-                  <a:schemeClr val="bg1">
-                    <a:alpha val="80000"/>
-                  </a:schemeClr>
-                </a:solidFill>
-              </a:rPr>
-              <a:t> temporal: </a:t>
-            </a:r>
-            <a:r>
-              <a:rPr lang="en-US" sz="2000" b="1" dirty="0" err="1">
-                <a:solidFill>
-                  <a:schemeClr val="bg1">
-                    <a:alpha val="80000"/>
-                  </a:schemeClr>
-                </a:solidFill>
-              </a:rPr>
-              <a:t>Noviembre</a:t>
-            </a:r>
-            <a:r>
-              <a:rPr lang="en-US" sz="2000" b="1" dirty="0">
-                <a:solidFill>
-                  <a:schemeClr val="bg1">
-                    <a:alpha val="80000"/>
-                  </a:schemeClr>
-                </a:solidFill>
-              </a:rPr>
-              <a:t>/2015 - </a:t>
-            </a:r>
-            <a:r>
-              <a:rPr lang="en-US" sz="2000" b="1" dirty="0" err="1">
-                <a:solidFill>
-                  <a:schemeClr val="bg1">
-                    <a:alpha val="80000"/>
-                  </a:schemeClr>
-                </a:solidFill>
-              </a:rPr>
-              <a:t>Diciembre</a:t>
-            </a:r>
-            <a:r>
-              <a:rPr lang="en-US" sz="2000" b="1" dirty="0">
-                <a:solidFill>
-                  <a:schemeClr val="bg1">
-                    <a:alpha val="80000"/>
-                  </a:schemeClr>
-                </a:solidFill>
-              </a:rPr>
-              <a:t>/2021</a:t>
+              <a:t>Cobertura temporal: Enero/2015 - Diciembre/2021 (28 trimestres)</a:t>
             </a:r>
           </a:p>
           <a:p>
@@ -8617,44 +8398,12 @@
               <a:buChar char="•"/>
             </a:pPr>
             <a:r>
-              <a:rPr lang="en-US" sz="2000" b="1" dirty="0" err="1">
+              <a:rPr lang="es-419" sz="2000" b="1" noProof="0" dirty="0">
                 <a:solidFill>
-                  <a:schemeClr val="bg1">
-                    <a:alpha val="80000"/>
-                  </a:schemeClr>
+                  <a:schemeClr val="bg1"/>
                 </a:solidFill>
               </a:rPr>
-              <a:t>Análisis</a:t>
-            </a:r>
-            <a:r>
-              <a:rPr lang="en-US" sz="2000" b="1" dirty="0">
-                <a:solidFill>
-                  <a:schemeClr val="bg1">
-                    <a:alpha val="80000"/>
-                  </a:schemeClr>
-                </a:solidFill>
-              </a:rPr>
-              <a:t> del </a:t>
-            </a:r>
-            <a:r>
-              <a:rPr lang="en-US" sz="2000" b="1" dirty="0" err="1">
-                <a:solidFill>
-                  <a:schemeClr val="bg1">
-                    <a:alpha val="80000"/>
-                  </a:schemeClr>
-                </a:solidFill>
-              </a:rPr>
-              <a:t>empleo</a:t>
-            </a:r>
-            <a:r>
-              <a:rPr lang="en-US" sz="2000" b="1" dirty="0">
-                <a:solidFill>
-                  <a:schemeClr val="bg1">
-                    <a:alpha val="80000"/>
-                  </a:schemeClr>
-                </a:solidFill>
-              </a:rPr>
-              <a:t> formal privado.</a:t>
+              <a:t>Análisis del empleo formal privado.</a:t>
             </a:r>
           </a:p>
           <a:p>
@@ -8663,170 +8412,12 @@
               <a:buChar char="•"/>
             </a:pPr>
             <a:r>
-              <a:rPr lang="en-US" sz="2000" b="1" dirty="0" err="1">
-                <a:solidFill>
-                  <a:schemeClr val="bg1">
-                    <a:alpha val="80000"/>
-                  </a:schemeClr>
-                </a:solidFill>
-              </a:rPr>
-              <a:t>Análisis</a:t>
-            </a:r>
-            <a:r>
-              <a:rPr lang="en-US" sz="2000" b="1" dirty="0">
-                <a:solidFill>
-                  <a:schemeClr val="bg1">
-                    <a:alpha val="80000"/>
-                  </a:schemeClr>
-                </a:solidFill>
-              </a:rPr>
-              <a:t> de </a:t>
-            </a:r>
-            <a:r>
-              <a:rPr lang="en-US" sz="2000" b="1" dirty="0" err="1">
-                <a:solidFill>
-                  <a:schemeClr val="bg1">
-                    <a:alpha val="80000"/>
-                  </a:schemeClr>
-                </a:solidFill>
-              </a:rPr>
-              <a:t>proyectos</a:t>
-            </a:r>
-            <a:r>
-              <a:rPr lang="en-US" sz="2000" b="1" dirty="0">
-                <a:solidFill>
-                  <a:schemeClr val="bg1">
-                    <a:alpha val="80000"/>
-                  </a:schemeClr>
-                </a:solidFill>
-              </a:rPr>
-              <a:t> </a:t>
-            </a:r>
-            <a:r>
-              <a:rPr lang="en-US" sz="2000" b="1" dirty="0" err="1">
-                <a:solidFill>
-                  <a:schemeClr val="bg1">
-                    <a:alpha val="80000"/>
-                  </a:schemeClr>
-                </a:solidFill>
-              </a:rPr>
-              <a:t>por</a:t>
-            </a:r>
-            <a:r>
-              <a:rPr lang="en-US" sz="2000" b="1" dirty="0">
-                <a:solidFill>
-                  <a:schemeClr val="bg1">
-                    <a:alpha val="80000"/>
-                  </a:schemeClr>
-                </a:solidFill>
-              </a:rPr>
-              <a:t> </a:t>
-            </a:r>
-            <a:r>
-              <a:rPr lang="en-US" sz="2000" b="1" dirty="0" err="1">
-                <a:solidFill>
-                  <a:schemeClr val="bg1">
-                    <a:alpha val="80000"/>
-                  </a:schemeClr>
-                </a:solidFill>
-              </a:rPr>
-              <a:t>su</a:t>
-            </a:r>
-            <a:r>
-              <a:rPr lang="en-US" sz="2000" b="1" dirty="0">
-                <a:solidFill>
-                  <a:schemeClr val="bg1">
-                    <a:alpha val="80000"/>
-                  </a:schemeClr>
-                </a:solidFill>
-              </a:rPr>
-              <a:t> </a:t>
-            </a:r>
-            <a:r>
-              <a:rPr lang="en-US" sz="2000" b="1" dirty="0" err="1">
-                <a:solidFill>
-                  <a:schemeClr val="bg1">
-                    <a:alpha val="80000"/>
-                  </a:schemeClr>
-                </a:solidFill>
-              </a:rPr>
-              <a:t>ubicación</a:t>
-            </a:r>
-            <a:r>
-              <a:rPr lang="en-US" sz="2000" b="1" dirty="0">
-                <a:solidFill>
-                  <a:schemeClr val="bg1">
-                    <a:alpha val="80000"/>
-                  </a:schemeClr>
-                </a:solidFill>
-              </a:rPr>
-              <a:t>, </a:t>
-            </a:r>
-            <a:r>
-              <a:rPr lang="en-US" sz="2000" b="1" dirty="0" err="1">
-                <a:solidFill>
-                  <a:schemeClr val="bg1">
-                    <a:alpha val="80000"/>
-                  </a:schemeClr>
-                </a:solidFill>
-              </a:rPr>
-              <a:t>potencia</a:t>
-            </a:r>
-            <a:r>
-              <a:rPr lang="en-US" sz="2000" b="1" dirty="0">
-                <a:solidFill>
-                  <a:schemeClr val="bg1">
-                    <a:alpha val="80000"/>
-                  </a:schemeClr>
-                </a:solidFill>
-              </a:rPr>
-              <a:t> y </a:t>
-            </a:r>
-            <a:r>
-              <a:rPr lang="en-US" sz="2000" b="1" dirty="0" err="1">
-                <a:solidFill>
-                  <a:schemeClr val="bg1">
-                    <a:alpha val="80000"/>
-                  </a:schemeClr>
-                </a:solidFill>
-              </a:rPr>
-              <a:t>tipo</a:t>
-            </a:r>
-            <a:r>
-              <a:rPr lang="en-US" sz="2000" b="1" dirty="0">
-                <a:solidFill>
-                  <a:schemeClr val="bg1">
-                    <a:alpha val="80000"/>
-                  </a:schemeClr>
-                </a:solidFill>
-              </a:rPr>
-              <a:t> de </a:t>
-            </a:r>
-            <a:r>
-              <a:rPr lang="en-US" sz="2000" b="1" dirty="0" err="1">
-                <a:solidFill>
-                  <a:schemeClr val="bg1">
-                    <a:alpha val="80000"/>
-                  </a:schemeClr>
-                </a:solidFill>
-              </a:rPr>
-              <a:t>energí</a:t>
-            </a:r>
-            <a:r>
-              <a:rPr lang="en-US" sz="2000" b="1" dirty="0" err="1">
+              <a:rPr lang="es-419" sz="2000" b="1" noProof="0" dirty="0">
                 <a:solidFill>
                   <a:schemeClr val="bg1"/>
                 </a:solidFill>
               </a:rPr>
-              <a:t>a</a:t>
-            </a:r>
-            <a:r>
-              <a:rPr lang="en-US" sz="2000" b="1" dirty="0">
-                <a:solidFill>
-                  <a:schemeClr val="bg1"/>
-                </a:solidFill>
-              </a:rPr>
-              <a:t>.</a:t>
+              <a:t>Análisis de salarios.</a:t>
             </a:r>
           </a:p>
           <a:p>
@@ -8835,12 +8426,12 @@
               <a:buChar char="•"/>
             </a:pPr>
             <a:r>
-              <a:rPr lang="es-ES" sz="2000" b="1" dirty="0">
+              <a:rPr lang="es-419" sz="2000" b="1" noProof="0" dirty="0">
                 <a:solidFill>
                   <a:schemeClr val="bg1"/>
                 </a:solidFill>
               </a:rPr>
-              <a:t>Cada trimestre cuenta con aproximadamente 10.482 registros, lo que indica una cobertura temporal uniforme en la base de datos.</a:t>
+              <a:t>La base contiene en total 293.400 filas</a:t>
             </a:r>
           </a:p>
           <a:p>
@@ -8977,6 +8568,276 @@
           </a:fontRef>
         </p:style>
       </p:cxnSp>
+      <p:pic>
+        <p:nvPicPr>
+          <p:cNvPr id="3" name="Imagen 5" descr="Mapa&#10;&#10;El contenido generado por IA puede ser incorrecto.">
+            <a:extLst>
+              <a:ext uri="{FF2B5EF4-FFF2-40B4-BE49-F238E27FC236}">
+                <a16:creationId xmlns:a16="http://schemas.microsoft.com/office/drawing/2014/main" id="{9BA5E991-20CF-6D54-6099-E0EC27380360}"/>
+              </a:ext>
+            </a:extLst>
+          </p:cNvPr>
+          <p:cNvPicPr>
+            <a:picLocks noChangeAspect="1"/>
+          </p:cNvPicPr>
+          <p:nvPr/>
+        </p:nvPicPr>
+        <p:blipFill>
+          <a:blip r:embed="rId2">
+            <a:extLst>
+              <a:ext uri="{28A0092B-C50C-407E-A947-70E740481C1C}">
+                <a14:useLocalDpi xmlns:a14="http://schemas.microsoft.com/office/drawing/2010/main" val="0"/>
+              </a:ext>
+            </a:extLst>
+          </a:blip>
+          <a:stretch>
+            <a:fillRect/>
+          </a:stretch>
+        </p:blipFill>
+        <p:spPr>
+          <a:xfrm>
+            <a:off x="1280035" y="292893"/>
+            <a:ext cx="3226651" cy="6272214"/>
+          </a:xfrm>
+          <a:prstGeom prst="rect">
+            <a:avLst/>
+          </a:prstGeom>
+        </p:spPr>
+      </p:pic>
+      <p:sp>
+        <p:nvSpPr>
+          <p:cNvPr id="5" name="Text Placeholder 3">
+            <a:extLst>
+              <a:ext uri="{FF2B5EF4-FFF2-40B4-BE49-F238E27FC236}">
+                <a16:creationId xmlns:a16="http://schemas.microsoft.com/office/drawing/2014/main" id="{5401F595-7C73-1890-FC59-29F49744C4D6}"/>
+              </a:ext>
+            </a:extLst>
+          </p:cNvPr>
+          <p:cNvSpPr txBox="1">
+            <a:spLocks/>
+          </p:cNvSpPr>
+          <p:nvPr/>
+        </p:nvSpPr>
+        <p:spPr>
+          <a:xfrm>
+            <a:off x="6443036" y="5143348"/>
+            <a:ext cx="4480001" cy="1415143"/>
+          </a:xfrm>
+          <a:prstGeom prst="rect">
+            <a:avLst/>
+          </a:prstGeom>
+        </p:spPr>
+        <p:style>
+          <a:lnRef idx="2">
+            <a:schemeClr val="accent4">
+              <a:shade val="15000"/>
+            </a:schemeClr>
+          </a:lnRef>
+          <a:fillRef idx="1">
+            <a:schemeClr val="accent4"/>
+          </a:fillRef>
+          <a:effectRef idx="0">
+            <a:schemeClr val="accent4"/>
+          </a:effectRef>
+          <a:fontRef idx="minor">
+            <a:schemeClr val="lt1"/>
+          </a:fontRef>
+        </p:style>
+        <p:txBody>
+          <a:bodyPr vert="horz" lIns="91440" tIns="45720" rIns="91440" bIns="45720" rtlCol="0" anchor="t">
+            <a:normAutofit fontScale="25000" lnSpcReduction="20000"/>
+          </a:bodyPr>
+          <a:lstStyle>
+            <a:lvl1pPr marL="0" indent="0" algn="l" defTabSz="914400" rtl="0" eaLnBrk="1" latinLnBrk="0" hangingPunct="1">
+              <a:lnSpc>
+                <a:spcPct val="90000"/>
+              </a:lnSpc>
+              <a:spcBef>
+                <a:spcPts val="1000"/>
+              </a:spcBef>
+              <a:buFont typeface="Arial" panose="020B0604020202020204" pitchFamily="34" charset="0"/>
+              <a:buNone/>
+              <a:defRPr sz="1600" kern="1200">
+                <a:solidFill>
+                  <a:schemeClr val="lt1"/>
+                </a:solidFill>
+                <a:latin typeface="+mn-lt"/>
+                <a:ea typeface="+mn-ea"/>
+                <a:cs typeface="+mn-cs"/>
+              </a:defRPr>
+            </a:lvl1pPr>
+            <a:lvl2pPr marL="457200" indent="0" algn="l" defTabSz="914400" rtl="0" eaLnBrk="1" latinLnBrk="0" hangingPunct="1">
+              <a:lnSpc>
+                <a:spcPct val="90000"/>
+              </a:lnSpc>
+              <a:spcBef>
+                <a:spcPts val="500"/>
+              </a:spcBef>
+              <a:buFont typeface="Arial" panose="020B0604020202020204" pitchFamily="34" charset="0"/>
+              <a:buNone/>
+              <a:defRPr sz="1400" kern="1200">
+                <a:solidFill>
+                  <a:schemeClr val="lt1"/>
+                </a:solidFill>
+                <a:latin typeface="+mn-lt"/>
+                <a:ea typeface="+mn-ea"/>
+                <a:cs typeface="+mn-cs"/>
+              </a:defRPr>
+            </a:lvl2pPr>
+            <a:lvl3pPr marL="914400" indent="0" algn="l" defTabSz="914400" rtl="0" eaLnBrk="1" latinLnBrk="0" hangingPunct="1">
+              <a:lnSpc>
+                <a:spcPct val="90000"/>
+              </a:lnSpc>
+              <a:spcBef>
+                <a:spcPts val="500"/>
+              </a:spcBef>
+              <a:buFont typeface="Arial" panose="020B0604020202020204" pitchFamily="34" charset="0"/>
+              <a:buNone/>
+              <a:defRPr sz="1200" kern="1200">
+                <a:solidFill>
+                  <a:schemeClr val="lt1"/>
+                </a:solidFill>
+                <a:latin typeface="+mn-lt"/>
+                <a:ea typeface="+mn-ea"/>
+                <a:cs typeface="+mn-cs"/>
+              </a:defRPr>
+            </a:lvl3pPr>
+            <a:lvl4pPr marL="1371600" indent="0" algn="l" defTabSz="914400" rtl="0" eaLnBrk="1" latinLnBrk="0" hangingPunct="1">
+              <a:lnSpc>
+                <a:spcPct val="90000"/>
+              </a:lnSpc>
+              <a:spcBef>
+                <a:spcPts val="500"/>
+              </a:spcBef>
+              <a:buFont typeface="Arial" panose="020B0604020202020204" pitchFamily="34" charset="0"/>
+              <a:buNone/>
+              <a:defRPr sz="1000" kern="1200">
+                <a:solidFill>
+                  <a:schemeClr val="lt1"/>
+                </a:solidFill>
+                <a:latin typeface="+mn-lt"/>
+                <a:ea typeface="+mn-ea"/>
+                <a:cs typeface="+mn-cs"/>
+              </a:defRPr>
+            </a:lvl4pPr>
+            <a:lvl5pPr marL="1828800" indent="0" algn="l" defTabSz="914400" rtl="0" eaLnBrk="1" latinLnBrk="0" hangingPunct="1">
+              <a:lnSpc>
+                <a:spcPct val="90000"/>
+              </a:lnSpc>
+              <a:spcBef>
+                <a:spcPts val="500"/>
+              </a:spcBef>
+              <a:buFont typeface="Arial" panose="020B0604020202020204" pitchFamily="34" charset="0"/>
+              <a:buNone/>
+              <a:defRPr sz="1000" kern="1200">
+                <a:solidFill>
+                  <a:schemeClr val="lt1"/>
+                </a:solidFill>
+                <a:latin typeface="+mn-lt"/>
+                <a:ea typeface="+mn-ea"/>
+                <a:cs typeface="+mn-cs"/>
+              </a:defRPr>
+            </a:lvl5pPr>
+            <a:lvl6pPr marL="2286000" indent="0" algn="l" defTabSz="914400" rtl="0" eaLnBrk="1" latinLnBrk="0" hangingPunct="1">
+              <a:lnSpc>
+                <a:spcPct val="90000"/>
+              </a:lnSpc>
+              <a:spcBef>
+                <a:spcPts val="500"/>
+              </a:spcBef>
+              <a:buFont typeface="Arial" panose="020B0604020202020204" pitchFamily="34" charset="0"/>
+              <a:buNone/>
+              <a:defRPr sz="1000" kern="1200">
+                <a:solidFill>
+                  <a:schemeClr val="lt1"/>
+                </a:solidFill>
+                <a:latin typeface="+mn-lt"/>
+                <a:ea typeface="+mn-ea"/>
+                <a:cs typeface="+mn-cs"/>
+              </a:defRPr>
+            </a:lvl6pPr>
+            <a:lvl7pPr marL="2743200" indent="0" algn="l" defTabSz="914400" rtl="0" eaLnBrk="1" latinLnBrk="0" hangingPunct="1">
+              <a:lnSpc>
+                <a:spcPct val="90000"/>
+              </a:lnSpc>
+              <a:spcBef>
+                <a:spcPts val="500"/>
+              </a:spcBef>
+              <a:buFont typeface="Arial" panose="020B0604020202020204" pitchFamily="34" charset="0"/>
+              <a:buNone/>
+              <a:defRPr sz="1000" kern="1200">
+                <a:solidFill>
+                  <a:schemeClr val="lt1"/>
+                </a:solidFill>
+                <a:latin typeface="+mn-lt"/>
+                <a:ea typeface="+mn-ea"/>
+                <a:cs typeface="+mn-cs"/>
+              </a:defRPr>
+            </a:lvl7pPr>
+            <a:lvl8pPr marL="3200400" indent="0" algn="l" defTabSz="914400" rtl="0" eaLnBrk="1" latinLnBrk="0" hangingPunct="1">
+              <a:lnSpc>
+                <a:spcPct val="90000"/>
+              </a:lnSpc>
+              <a:spcBef>
+                <a:spcPts val="500"/>
+              </a:spcBef>
+              <a:buFont typeface="Arial" panose="020B0604020202020204" pitchFamily="34" charset="0"/>
+              <a:buNone/>
+              <a:defRPr sz="1000" kern="1200">
+                <a:solidFill>
+                  <a:schemeClr val="lt1"/>
+                </a:solidFill>
+                <a:latin typeface="+mn-lt"/>
+                <a:ea typeface="+mn-ea"/>
+                <a:cs typeface="+mn-cs"/>
+              </a:defRPr>
+            </a:lvl8pPr>
+            <a:lvl9pPr marL="3657600" indent="0" algn="l" defTabSz="914400" rtl="0" eaLnBrk="1" latinLnBrk="0" hangingPunct="1">
+              <a:lnSpc>
+                <a:spcPct val="90000"/>
+              </a:lnSpc>
+              <a:spcBef>
+                <a:spcPts val="500"/>
+              </a:spcBef>
+              <a:buFont typeface="Arial" panose="020B0604020202020204" pitchFamily="34" charset="0"/>
+              <a:buNone/>
+              <a:defRPr sz="1000" kern="1200">
+                <a:solidFill>
+                  <a:schemeClr val="lt1"/>
+                </a:solidFill>
+                <a:latin typeface="+mn-lt"/>
+                <a:ea typeface="+mn-ea"/>
+                <a:cs typeface="+mn-cs"/>
+              </a:defRPr>
+            </a:lvl9pPr>
+          </a:lstStyle>
+          <a:p>
+            <a:pPr indent="-228600">
+              <a:buFont typeface="Arial" panose="020B0604020202020204" pitchFamily="34" charset="0"/>
+              <a:buChar char="•"/>
+            </a:pPr>
+            <a:r>
+              <a:rPr lang="es-ES" sz="8000" b="1" dirty="0">
+                <a:solidFill>
+                  <a:schemeClr val="bg1"/>
+                </a:solidFill>
+              </a:rPr>
+              <a:t>Merge con la base de datos del Ministerio de Energía: Adjudicaciones de proyectos de energías renovables - Programa RenovAr (Noviembre/2016 – Julio 2019)</a:t>
+            </a:r>
+          </a:p>
+          <a:p>
+            <a:pPr indent="-228600">
+              <a:buFont typeface="Arial" panose="020B0604020202020204" pitchFamily="34" charset="0"/>
+              <a:buChar char="•"/>
+            </a:pPr>
+            <a:endParaRPr lang="es-ES" sz="2000" dirty="0">
+              <a:solidFill>
+                <a:schemeClr val="bg1"/>
+              </a:solidFill>
+            </a:endParaRPr>
+          </a:p>
+        </p:txBody>
+      </p:sp>
     </p:spTree>
     <p:extLst>
       <p:ext uri="{BB962C8B-B14F-4D97-AF65-F5344CB8AC3E}">
@@ -9120,18 +8981,9 @@
           <a:lstStyle/>
           <a:p>
             <a:r>
-              <a:rPr lang="en-US" sz="5200" dirty="0" err="1"/>
-              <a:t>Preparacion</a:t>
+              <a:rPr lang="en-US" sz="5200" dirty="0"/>
+              <a:t>Preparación de la base de datos</a:t>
             </a:r>
-            <a:r>
-              <a:rPr lang="en-US" sz="5200" dirty="0"/>
-              <a:t> de la base de </a:t>
-            </a:r>
-            <a:r>
-              <a:rPr lang="en-US" sz="5200" dirty="0" err="1"/>
-              <a:t>datos</a:t>
-            </a:r>
-            <a:endParaRPr lang="en-US" sz="5200" dirty="0"/>
           </a:p>
         </p:txBody>
       </p:sp>
@@ -9153,8 +9005,8 @@
         </p:nvSpPr>
         <p:spPr>
           <a:xfrm>
-            <a:off x="838200" y="2398626"/>
-            <a:ext cx="5158427" cy="3730460"/>
+            <a:off x="838201" y="2398626"/>
+            <a:ext cx="4201885" cy="3120431"/>
           </a:xfrm>
         </p:spPr>
         <p:style>
@@ -9180,8 +9032,7 @@
           <a:lstStyle/>
           <a:p>
             <a:r>
-              <a:rPr lang="es-AR" sz="2000" i="0" dirty="0">
-                <a:effectLst/>
+              <a:rPr lang="es-AR" sz="1400" dirty="0">
                 <a:latin typeface="ADLaM Display" panose="02010000000000000000" pitchFamily="2" charset="0"/>
                 <a:ea typeface="ADLaM Display" panose="02010000000000000000" pitchFamily="2" charset="0"/>
                 <a:cs typeface="ADLaM Display" panose="02010000000000000000" pitchFamily="2" charset="0"/>
@@ -9190,57 +9041,15 @@
             </a:r>
           </a:p>
           <a:p>
-            <a:pPr marL="0" indent="0">
-              <a:buNone/>
-            </a:pPr>
-            <a:endParaRPr lang="en-US" sz="2000" dirty="0"/>
-          </a:p>
-        </p:txBody>
-      </p:sp>
-      <p:sp>
-        <p:nvSpPr>
-          <p:cNvPr id="4" name="Content Placeholder 3">
-            <a:extLst>
-              <a:ext uri="{FF2B5EF4-FFF2-40B4-BE49-F238E27FC236}">
-                <a16:creationId xmlns:a16="http://schemas.microsoft.com/office/drawing/2014/main" id="{72D6200D-DFE8-C107-F669-9F0E39B94A99}"/>
-              </a:ext>
-            </a:extLst>
-          </p:cNvPr>
-          <p:cNvSpPr>
-            <a:spLocks noGrp="1"/>
-          </p:cNvSpPr>
-          <p:nvPr>
-            <p:ph sz="half" idx="2"/>
-          </p:nvPr>
-        </p:nvSpPr>
-        <p:spPr>
-          <a:xfrm>
-            <a:off x="6189154" y="2398626"/>
-            <a:ext cx="5164645" cy="3730460"/>
-          </a:xfrm>
-        </p:spPr>
-        <p:style>
-          <a:lnRef idx="3">
-            <a:schemeClr val="lt1"/>
-          </a:lnRef>
-          <a:fillRef idx="1">
-            <a:schemeClr val="accent1"/>
-          </a:fillRef>
-          <a:effectRef idx="1">
-            <a:schemeClr val="accent1"/>
-          </a:effectRef>
-          <a:fontRef idx="minor">
-            <a:schemeClr val="lt1"/>
-          </a:fontRef>
-        </p:style>
-        <p:txBody>
-          <a:bodyPr>
-            <a:normAutofit/>
-          </a:bodyPr>
-          <a:lstStyle/>
+            <a:endParaRPr lang="es-AR" sz="1400" dirty="0">
+              <a:latin typeface="ADLaM Display" panose="02010000000000000000" pitchFamily="2" charset="0"/>
+              <a:ea typeface="ADLaM Display" panose="02010000000000000000" pitchFamily="2" charset="0"/>
+              <a:cs typeface="ADLaM Display" panose="02010000000000000000" pitchFamily="2" charset="0"/>
+            </a:endParaRPr>
+          </a:p>
           <a:p>
             <a:r>
-              <a:rPr lang="es-AR" sz="2000" dirty="0">
+              <a:rPr lang="es-AR" sz="1400" dirty="0">
                 <a:latin typeface="ADLaM Display" panose="02010000000000000000" pitchFamily="2" charset="0"/>
                 <a:ea typeface="ADLaM Display" panose="02010000000000000000" pitchFamily="2" charset="0"/>
                 <a:cs typeface="ADLaM Display" panose="02010000000000000000" pitchFamily="2" charset="0"/>
@@ -9248,21 +9057,21 @@
               <a:t>Variables creadas:</a:t>
             </a:r>
             <a:br>
-              <a:rPr lang="es-AR" sz="2000" dirty="0">
+              <a:rPr lang="es-AR" sz="1400" dirty="0">
                 <a:latin typeface="ADLaM Display" panose="02010000000000000000" pitchFamily="2" charset="0"/>
                 <a:ea typeface="ADLaM Display" panose="02010000000000000000" pitchFamily="2" charset="0"/>
                 <a:cs typeface="ADLaM Display" panose="02010000000000000000" pitchFamily="2" charset="0"/>
               </a:rPr>
             </a:br>
             <a:br>
-              <a:rPr lang="es-AR" sz="2000" dirty="0">
+              <a:rPr lang="es-AR" sz="1400" dirty="0">
                 <a:latin typeface="ADLaM Display" panose="02010000000000000000" pitchFamily="2" charset="0"/>
                 <a:ea typeface="ADLaM Display" panose="02010000000000000000" pitchFamily="2" charset="0"/>
                 <a:cs typeface="ADLaM Display" panose="02010000000000000000" pitchFamily="2" charset="0"/>
               </a:rPr>
             </a:br>
             <a:r>
-              <a:rPr lang="es-AR" sz="2000" dirty="0" err="1">
+              <a:rPr lang="es-AR" sz="1400" dirty="0" err="1">
                 <a:latin typeface="ADLaM Display" panose="02010000000000000000" pitchFamily="2" charset="0"/>
                 <a:ea typeface="ADLaM Display" panose="02010000000000000000" pitchFamily="2" charset="0"/>
                 <a:cs typeface="ADLaM Display" panose="02010000000000000000" pitchFamily="2" charset="0"/>
@@ -9270,7 +9079,7 @@
               <a:t>dep_tratado</a:t>
             </a:r>
             <a:r>
-              <a:rPr lang="es-AR" sz="2000" dirty="0">
+              <a:rPr lang="es-AR" sz="1400" dirty="0">
                 <a:latin typeface="ADLaM Display" panose="02010000000000000000" pitchFamily="2" charset="0"/>
                 <a:ea typeface="ADLaM Display" panose="02010000000000000000" pitchFamily="2" charset="0"/>
                 <a:cs typeface="ADLaM Display" panose="02010000000000000000" pitchFamily="2" charset="0"/>
@@ -9278,7 +9087,7 @@
               <a:t>: Comprende a aquellos departamentos provinciales que recibieron adjudicaciones de proyectos de energías renovables del programa </a:t>
             </a:r>
             <a:r>
-              <a:rPr lang="es-AR" sz="2000" dirty="0" err="1">
+              <a:rPr lang="es-AR" sz="1400" dirty="0" err="1">
                 <a:latin typeface="ADLaM Display" panose="02010000000000000000" pitchFamily="2" charset="0"/>
                 <a:ea typeface="ADLaM Display" panose="02010000000000000000" pitchFamily="2" charset="0"/>
                 <a:cs typeface="ADLaM Display" panose="02010000000000000000" pitchFamily="2" charset="0"/>
@@ -9286,7 +9095,7 @@
               <a:t>RenovAr</a:t>
             </a:r>
             <a:r>
-              <a:rPr lang="es-AR" sz="2000" dirty="0">
+              <a:rPr lang="es-AR" sz="1400" dirty="0">
                 <a:latin typeface="ADLaM Display" panose="02010000000000000000" pitchFamily="2" charset="0"/>
                 <a:ea typeface="ADLaM Display" panose="02010000000000000000" pitchFamily="2" charset="0"/>
                 <a:cs typeface="ADLaM Display" panose="02010000000000000000" pitchFamily="2" charset="0"/>
@@ -9295,10 +9104,63 @@
             </a:r>
           </a:p>
           <a:p>
+            <a:endParaRPr lang="es-AR" sz="1400" dirty="0">
+              <a:latin typeface="ADLaM Display" panose="02010000000000000000" pitchFamily="2" charset="0"/>
+              <a:ea typeface="ADLaM Display" panose="02010000000000000000" pitchFamily="2" charset="0"/>
+              <a:cs typeface="ADLaM Display" panose="02010000000000000000" pitchFamily="2" charset="0"/>
+            </a:endParaRPr>
+          </a:p>
+          <a:p>
+            <a:pPr marL="0" indent="0">
+              <a:buNone/>
+            </a:pPr>
+            <a:r>
+              <a:rPr lang="es-AR" sz="1400" dirty="0">
+                <a:latin typeface="ADLaM Display" panose="02010000000000000000" pitchFamily="2" charset="0"/>
+                <a:ea typeface="ADLaM Display" panose="02010000000000000000" pitchFamily="2" charset="0"/>
+                <a:cs typeface="ADLaM Display" panose="02010000000000000000" pitchFamily="2" charset="0"/>
+              </a:rPr>
+              <a:t>     Trimestre</a:t>
+            </a:r>
+          </a:p>
+          <a:p>
+            <a:pPr marL="0" indent="0">
+              <a:buNone/>
+            </a:pPr>
             <a:endParaRPr lang="en-US" sz="2000" dirty="0"/>
           </a:p>
         </p:txBody>
       </p:sp>
+      <p:pic>
+        <p:nvPicPr>
+          <p:cNvPr id="5" name="Picture 4">
+            <a:extLst>
+              <a:ext uri="{FF2B5EF4-FFF2-40B4-BE49-F238E27FC236}">
+                <a16:creationId xmlns:a16="http://schemas.microsoft.com/office/drawing/2014/main" id="{68EC597C-618C-3D0D-4069-98FBA8F16139}"/>
+              </a:ext>
+            </a:extLst>
+          </p:cNvPr>
+          <p:cNvPicPr>
+            <a:picLocks noChangeAspect="1"/>
+          </p:cNvPicPr>
+          <p:nvPr/>
+        </p:nvPicPr>
+        <p:blipFill>
+          <a:blip r:embed="rId2"/>
+          <a:stretch>
+            <a:fillRect/>
+          </a:stretch>
+        </p:blipFill>
+        <p:spPr>
+          <a:xfrm>
+            <a:off x="5323113" y="2398626"/>
+            <a:ext cx="6449443" cy="3342303"/>
+          </a:xfrm>
+          <a:prstGeom prst="rect">
+            <a:avLst/>
+          </a:prstGeom>
+        </p:spPr>
+      </p:pic>
     </p:spTree>
     <p:extLst>
       <p:ext uri="{BB962C8B-B14F-4D97-AF65-F5344CB8AC3E}">
